--- a/chapter4/parts/part-04-annotation-techniques/clip.pptx
+++ b/chapter4/parts/part-04-annotation-techniques/clip.pptx
@@ -4313,7 +4313,7 @@
               </a:defRPr>
             </a:pPr>
             <a:r>
-              <a:t>Chapter 4 — 04 Annotation Techniques</a:t>
+              <a:t>Chapter 4 — Annotation Techniques</a:t>
             </a:r>
           </a:p>
         </p:txBody>
@@ -4492,7 +4492,7 @@
               </a:defRPr>
             </a:pPr>
             <a:r>
-              <a:t>Chapter 4 — 04 Annotation Techniques</a:t>
+              <a:t>Chapter 4 — Annotation Techniques</a:t>
             </a:r>
           </a:p>
         </p:txBody>
@@ -4651,7 +4651,7 @@
               </a:defRPr>
             </a:pPr>
             <a:r>
-              <a:t>Chapter 4 — 04 Annotation Techniques</a:t>
+              <a:t>Chapter 4 — Annotation Techniques</a:t>
             </a:r>
           </a:p>
         </p:txBody>
@@ -4830,7 +4830,7 @@
               </a:defRPr>
             </a:pPr>
             <a:r>
-              <a:t>Chapter 4 — 04 Annotation Techniques</a:t>
+              <a:t>Chapter 4 — Annotation Techniques</a:t>
             </a:r>
           </a:p>
         </p:txBody>
@@ -5069,7 +5069,7 @@
               </a:defRPr>
             </a:pPr>
             <a:r>
-              <a:t>Chapter 4 — 04 Annotation Techniques</a:t>
+              <a:t>Chapter 4 — Annotation Techniques</a:t>
             </a:r>
           </a:p>
         </p:txBody>
@@ -5228,7 +5228,7 @@
               </a:defRPr>
             </a:pPr>
             <a:r>
-              <a:t>Chapter 4 — 04 Annotation Techniques</a:t>
+              <a:t>Chapter 4 — Annotation Techniques</a:t>
             </a:r>
           </a:p>
         </p:txBody>
@@ -5467,7 +5467,7 @@
               </a:defRPr>
             </a:pPr>
             <a:r>
-              <a:t>Chapter 4 — 04 Annotation Techniques</a:t>
+              <a:t>Chapter 4 — Annotation Techniques</a:t>
             </a:r>
           </a:p>
         </p:txBody>
@@ -5646,7 +5646,7 @@
               </a:defRPr>
             </a:pPr>
             <a:r>
-              <a:t>Chapter 4 — 04 Annotation Techniques</a:t>
+              <a:t>Chapter 4 — Annotation Techniques</a:t>
             </a:r>
           </a:p>
         </p:txBody>
@@ -5885,7 +5885,7 @@
               </a:defRPr>
             </a:pPr>
             <a:r>
-              <a:t>Chapter 4 — 04 Annotation Techniques</a:t>
+              <a:t>Chapter 4 — Annotation Techniques</a:t>
             </a:r>
           </a:p>
         </p:txBody>
@@ -6064,7 +6064,7 @@
               </a:defRPr>
             </a:pPr>
             <a:r>
-              <a:t>Chapter 4 — 04 Annotation Techniques</a:t>
+              <a:t>Chapter 4 — Annotation Techniques</a:t>
             </a:r>
           </a:p>
         </p:txBody>
@@ -6303,7 +6303,7 @@
               </a:defRPr>
             </a:pPr>
             <a:r>
-              <a:t>Chapter 4 — 04 Annotation Techniques</a:t>
+              <a:t>Chapter 4 — Annotation Techniques</a:t>
             </a:r>
           </a:p>
         </p:txBody>

--- a/chapter4/parts/part-04-annotation-techniques/clip.pptx
+++ b/chapter4/parts/part-04-annotation-techniques/clip.pptx
@@ -4397,10 +4397,12 @@
           </a:bodyPr>
           <a:lstStyle/>
           <a:p>
-            <a:pPr>
+            <a:pPr lvl="0" marL="457200" indent="-228600">
+              <a:buFont typeface="Calibri"/>
               <a:spcAft>
                 <a:spcPts val="1000"/>
               </a:spcAft>
+              <a:buSzPct val="100000"/>
               <a:buChar char="•"/>
               <a:lnSpc>
                 <a:spcPts val="2200"/>
@@ -4417,10 +4419,12 @@
             </a:r>
           </a:p>
           <a:p>
-            <a:pPr>
+            <a:pPr lvl="0" marL="457200" indent="-228600">
+              <a:buFont typeface="Calibri"/>
               <a:spcAft>
                 <a:spcPts val="1000"/>
               </a:spcAft>
+              <a:buSzPct val="100000"/>
               <a:buChar char="•"/>
               <a:lnSpc>
                 <a:spcPts val="2200"/>
@@ -4437,10 +4441,12 @@
             </a:r>
           </a:p>
           <a:p>
-            <a:pPr>
+            <a:pPr lvl="0" marL="457200" indent="-228600">
+              <a:buFont typeface="Calibri"/>
               <a:spcAft>
                 <a:spcPts val="1000"/>
               </a:spcAft>
+              <a:buSzPct val="100000"/>
               <a:buChar char="•"/>
               <a:lnSpc>
                 <a:spcPts val="2200"/>
@@ -4576,10 +4582,12 @@
           </a:bodyPr>
           <a:lstStyle/>
           <a:p>
-            <a:pPr>
+            <a:pPr lvl="0" marL="457200" indent="-228600">
+              <a:buFont typeface="Calibri"/>
               <a:spcAft>
                 <a:spcPts val="1000"/>
               </a:spcAft>
+              <a:buSzPct val="100000"/>
               <a:buChar char="•"/>
               <a:lnSpc>
                 <a:spcPts val="2200"/>
@@ -4596,10 +4604,12 @@
             </a:r>
           </a:p>
           <a:p>
-            <a:pPr>
+            <a:pPr lvl="0" marL="457200" indent="-228600">
+              <a:buFont typeface="Calibri"/>
               <a:spcAft>
                 <a:spcPts val="1000"/>
               </a:spcAft>
+              <a:buSzPct val="100000"/>
               <a:buChar char="•"/>
               <a:lnSpc>
                 <a:spcPts val="2200"/>
@@ -4735,10 +4745,12 @@
           </a:bodyPr>
           <a:lstStyle/>
           <a:p>
-            <a:pPr>
+            <a:pPr lvl="0" marL="457200" indent="-228600">
+              <a:buFont typeface="Calibri"/>
               <a:spcAft>
                 <a:spcPts val="1000"/>
               </a:spcAft>
+              <a:buSzPct val="100000"/>
               <a:buChar char="•"/>
               <a:lnSpc>
                 <a:spcPts val="2200"/>
@@ -4755,10 +4767,12 @@
             </a:r>
           </a:p>
           <a:p>
-            <a:pPr>
+            <a:pPr lvl="0" marL="457200" indent="-228600">
+              <a:buFont typeface="Calibri"/>
               <a:spcAft>
                 <a:spcPts val="1000"/>
               </a:spcAft>
+              <a:buSzPct val="100000"/>
               <a:buChar char="•"/>
               <a:lnSpc>
                 <a:spcPts val="2200"/>
@@ -4775,10 +4789,12 @@
             </a:r>
           </a:p>
           <a:p>
-            <a:pPr>
+            <a:pPr lvl="0" marL="457200" indent="-228600">
+              <a:buFont typeface="Calibri"/>
               <a:spcAft>
                 <a:spcPts val="1000"/>
               </a:spcAft>
+              <a:buSzPct val="100000"/>
               <a:buChar char="•"/>
               <a:lnSpc>
                 <a:spcPts val="2200"/>
@@ -4914,10 +4930,12 @@
           </a:bodyPr>
           <a:lstStyle/>
           <a:p>
-            <a:pPr>
+            <a:pPr lvl="0" marL="457200" indent="-228600">
+              <a:buFont typeface="Calibri"/>
               <a:spcAft>
                 <a:spcPts val="1000"/>
               </a:spcAft>
+              <a:buSzPct val="100000"/>
               <a:buChar char="•"/>
               <a:lnSpc>
                 <a:spcPts val="2200"/>
@@ -4934,10 +4952,12 @@
             </a:r>
           </a:p>
           <a:p>
-            <a:pPr>
+            <a:pPr lvl="0" marL="457200" indent="-228600">
+              <a:buFont typeface="Calibri"/>
               <a:spcAft>
                 <a:spcPts val="1000"/>
               </a:spcAft>
+              <a:buSzPct val="100000"/>
               <a:buChar char="•"/>
               <a:lnSpc>
                 <a:spcPts val="2200"/>
@@ -4954,10 +4974,12 @@
             </a:r>
           </a:p>
           <a:p>
-            <a:pPr>
+            <a:pPr lvl="0" marL="457200" indent="-228600">
+              <a:buFont typeface="Calibri"/>
               <a:spcAft>
                 <a:spcPts val="1000"/>
               </a:spcAft>
+              <a:buSzPct val="100000"/>
               <a:buChar char="•"/>
               <a:lnSpc>
                 <a:spcPts val="2200"/>
@@ -4974,10 +4996,12 @@
             </a:r>
           </a:p>
           <a:p>
-            <a:pPr>
+            <a:pPr lvl="0" marL="457200" indent="-228600">
+              <a:buFont typeface="Calibri"/>
               <a:spcAft>
                 <a:spcPts val="1000"/>
               </a:spcAft>
+              <a:buSzPct val="100000"/>
               <a:buChar char="•"/>
               <a:lnSpc>
                 <a:spcPts val="2200"/>
@@ -4994,10 +5018,12 @@
             </a:r>
           </a:p>
           <a:p>
-            <a:pPr>
+            <a:pPr lvl="0" marL="457200" indent="-228600">
+              <a:buFont typeface="Calibri"/>
               <a:spcAft>
                 <a:spcPts val="1000"/>
               </a:spcAft>
+              <a:buSzPct val="100000"/>
               <a:buChar char="•"/>
               <a:lnSpc>
                 <a:spcPts val="2200"/>
@@ -5014,10 +5040,12 @@
             </a:r>
           </a:p>
           <a:p>
-            <a:pPr>
+            <a:pPr lvl="0" marL="457200" indent="-228600">
+              <a:buFont typeface="Calibri"/>
               <a:spcAft>
                 <a:spcPts val="1000"/>
               </a:spcAft>
+              <a:buSzPct val="100000"/>
               <a:buChar char="•"/>
               <a:lnSpc>
                 <a:spcPts val="2200"/>
@@ -5153,10 +5181,12 @@
           </a:bodyPr>
           <a:lstStyle/>
           <a:p>
-            <a:pPr>
+            <a:pPr lvl="0" marL="457200" indent="-228600">
+              <a:buFont typeface="Calibri"/>
               <a:spcAft>
                 <a:spcPts val="1000"/>
               </a:spcAft>
+              <a:buSzPct val="100000"/>
               <a:buChar char="•"/>
               <a:lnSpc>
                 <a:spcPts val="2200"/>
@@ -5173,10 +5203,12 @@
             </a:r>
           </a:p>
           <a:p>
-            <a:pPr>
+            <a:pPr lvl="0" marL="457200" indent="-228600">
+              <a:buFont typeface="Calibri"/>
               <a:spcAft>
                 <a:spcPts val="1000"/>
               </a:spcAft>
+              <a:buSzPct val="100000"/>
               <a:buChar char="•"/>
               <a:lnSpc>
                 <a:spcPts val="2200"/>
@@ -5312,10 +5344,12 @@
           </a:bodyPr>
           <a:lstStyle/>
           <a:p>
-            <a:pPr>
+            <a:pPr lvl="0" marL="457200" indent="-228600">
+              <a:buFont typeface="Calibri"/>
               <a:spcAft>
                 <a:spcPts val="1000"/>
               </a:spcAft>
+              <a:buSzPct val="100000"/>
               <a:buChar char="•"/>
               <a:lnSpc>
                 <a:spcPts val="2200"/>
@@ -5332,10 +5366,12 @@
             </a:r>
           </a:p>
           <a:p>
-            <a:pPr>
+            <a:pPr lvl="0" marL="457200" indent="-228600">
+              <a:buFont typeface="Calibri"/>
               <a:spcAft>
                 <a:spcPts val="1000"/>
               </a:spcAft>
+              <a:buSzPct val="100000"/>
               <a:buChar char="•"/>
               <a:lnSpc>
                 <a:spcPts val="2200"/>
@@ -5352,10 +5388,12 @@
             </a:r>
           </a:p>
           <a:p>
-            <a:pPr>
+            <a:pPr lvl="0" marL="457200" indent="-228600">
+              <a:buFont typeface="Calibri"/>
               <a:spcAft>
                 <a:spcPts val="1000"/>
               </a:spcAft>
+              <a:buSzPct val="100000"/>
               <a:buChar char="•"/>
               <a:lnSpc>
                 <a:spcPts val="2200"/>
@@ -5372,10 +5410,12 @@
             </a:r>
           </a:p>
           <a:p>
-            <a:pPr>
+            <a:pPr lvl="0" marL="457200" indent="-228600">
+              <a:buFont typeface="Calibri"/>
               <a:spcAft>
                 <a:spcPts val="1000"/>
               </a:spcAft>
+              <a:buSzPct val="100000"/>
               <a:buChar char="•"/>
               <a:lnSpc>
                 <a:spcPts val="2200"/>
@@ -5392,10 +5432,12 @@
             </a:r>
           </a:p>
           <a:p>
-            <a:pPr>
+            <a:pPr lvl="0" marL="457200" indent="-228600">
+              <a:buFont typeface="Calibri"/>
               <a:spcAft>
                 <a:spcPts val="1000"/>
               </a:spcAft>
+              <a:buSzPct val="100000"/>
               <a:buChar char="•"/>
               <a:lnSpc>
                 <a:spcPts val="2200"/>
@@ -5412,10 +5454,12 @@
             </a:r>
           </a:p>
           <a:p>
-            <a:pPr>
+            <a:pPr lvl="0" marL="457200" indent="-228600">
+              <a:buFont typeface="Calibri"/>
               <a:spcAft>
                 <a:spcPts val="1000"/>
               </a:spcAft>
+              <a:buSzPct val="100000"/>
               <a:buChar char="•"/>
               <a:lnSpc>
                 <a:spcPts val="2200"/>
@@ -5551,10 +5595,12 @@
           </a:bodyPr>
           <a:lstStyle/>
           <a:p>
-            <a:pPr>
+            <a:pPr lvl="0" marL="457200" indent="-228600">
+              <a:buFont typeface="Calibri"/>
               <a:spcAft>
                 <a:spcPts val="1000"/>
               </a:spcAft>
+              <a:buSzPct val="100000"/>
               <a:buChar char="•"/>
               <a:lnSpc>
                 <a:spcPts val="2200"/>
@@ -5571,10 +5617,12 @@
             </a:r>
           </a:p>
           <a:p>
-            <a:pPr>
+            <a:pPr lvl="0" marL="457200" indent="-228600">
+              <a:buFont typeface="Calibri"/>
               <a:spcAft>
                 <a:spcPts val="1000"/>
               </a:spcAft>
+              <a:buSzPct val="100000"/>
               <a:buChar char="•"/>
               <a:lnSpc>
                 <a:spcPts val="2200"/>
@@ -5591,10 +5639,12 @@
             </a:r>
           </a:p>
           <a:p>
-            <a:pPr>
+            <a:pPr lvl="0" marL="457200" indent="-228600">
+              <a:buFont typeface="Calibri"/>
               <a:spcAft>
                 <a:spcPts val="1000"/>
               </a:spcAft>
+              <a:buSzPct val="100000"/>
               <a:buChar char="•"/>
               <a:lnSpc>
                 <a:spcPts val="2200"/>
@@ -5730,10 +5780,12 @@
           </a:bodyPr>
           <a:lstStyle/>
           <a:p>
-            <a:pPr>
+            <a:pPr lvl="0" marL="457200" indent="-228600">
+              <a:buFont typeface="Calibri"/>
               <a:spcAft>
                 <a:spcPts val="1000"/>
               </a:spcAft>
+              <a:buSzPct val="100000"/>
               <a:buChar char="•"/>
               <a:lnSpc>
                 <a:spcPts val="2200"/>
@@ -5750,10 +5802,12 @@
             </a:r>
           </a:p>
           <a:p>
-            <a:pPr>
+            <a:pPr lvl="0" marL="457200" indent="-228600">
+              <a:buFont typeface="Calibri"/>
               <a:spcAft>
                 <a:spcPts val="1000"/>
               </a:spcAft>
+              <a:buSzPct val="100000"/>
               <a:buChar char="•"/>
               <a:lnSpc>
                 <a:spcPts val="2200"/>
@@ -5770,10 +5824,12 @@
             </a:r>
           </a:p>
           <a:p>
-            <a:pPr>
+            <a:pPr lvl="0" marL="457200" indent="-228600">
+              <a:buFont typeface="Calibri"/>
               <a:spcAft>
                 <a:spcPts val="1000"/>
               </a:spcAft>
+              <a:buSzPct val="100000"/>
               <a:buChar char="•"/>
               <a:lnSpc>
                 <a:spcPts val="2200"/>
@@ -5790,10 +5846,12 @@
             </a:r>
           </a:p>
           <a:p>
-            <a:pPr>
+            <a:pPr lvl="0" marL="457200" indent="-228600">
+              <a:buFont typeface="Calibri"/>
               <a:spcAft>
                 <a:spcPts val="1000"/>
               </a:spcAft>
+              <a:buSzPct val="100000"/>
               <a:buChar char="•"/>
               <a:lnSpc>
                 <a:spcPts val="2200"/>
@@ -5810,10 +5868,12 @@
             </a:r>
           </a:p>
           <a:p>
-            <a:pPr>
+            <a:pPr lvl="0" marL="457200" indent="-228600">
+              <a:buFont typeface="Calibri"/>
               <a:spcAft>
                 <a:spcPts val="1000"/>
               </a:spcAft>
+              <a:buSzPct val="100000"/>
               <a:buChar char="•"/>
               <a:lnSpc>
                 <a:spcPts val="2200"/>
@@ -5830,10 +5890,12 @@
             </a:r>
           </a:p>
           <a:p>
-            <a:pPr>
+            <a:pPr lvl="0" marL="457200" indent="-228600">
+              <a:buFont typeface="Calibri"/>
               <a:spcAft>
                 <a:spcPts val="1000"/>
               </a:spcAft>
+              <a:buSzPct val="100000"/>
               <a:buChar char="•"/>
               <a:lnSpc>
                 <a:spcPts val="2200"/>
@@ -5969,10 +6031,12 @@
           </a:bodyPr>
           <a:lstStyle/>
           <a:p>
-            <a:pPr>
+            <a:pPr lvl="0" marL="457200" indent="-228600">
+              <a:buFont typeface="Calibri"/>
               <a:spcAft>
                 <a:spcPts val="1000"/>
               </a:spcAft>
+              <a:buSzPct val="100000"/>
               <a:buChar char="•"/>
               <a:lnSpc>
                 <a:spcPts val="2200"/>
@@ -5989,10 +6053,12 @@
             </a:r>
           </a:p>
           <a:p>
-            <a:pPr>
+            <a:pPr lvl="0" marL="457200" indent="-228600">
+              <a:buFont typeface="Calibri"/>
               <a:spcAft>
                 <a:spcPts val="1000"/>
               </a:spcAft>
+              <a:buSzPct val="100000"/>
               <a:buChar char="•"/>
               <a:lnSpc>
                 <a:spcPts val="2200"/>
@@ -6009,10 +6075,12 @@
             </a:r>
           </a:p>
           <a:p>
-            <a:pPr>
+            <a:pPr lvl="0" marL="457200" indent="-228600">
+              <a:buFont typeface="Calibri"/>
               <a:spcAft>
                 <a:spcPts val="1000"/>
               </a:spcAft>
+              <a:buSzPct val="100000"/>
               <a:buChar char="•"/>
               <a:lnSpc>
                 <a:spcPts val="2200"/>
@@ -6148,10 +6216,12 @@
           </a:bodyPr>
           <a:lstStyle/>
           <a:p>
-            <a:pPr>
+            <a:pPr lvl="0" marL="457200" indent="-228600">
+              <a:buFont typeface="Calibri"/>
               <a:spcAft>
                 <a:spcPts val="1000"/>
               </a:spcAft>
+              <a:buSzPct val="100000"/>
               <a:buChar char="•"/>
               <a:lnSpc>
                 <a:spcPts val="2200"/>
@@ -6168,10 +6238,12 @@
             </a:r>
           </a:p>
           <a:p>
-            <a:pPr>
+            <a:pPr lvl="0" marL="457200" indent="-228600">
+              <a:buFont typeface="Calibri"/>
               <a:spcAft>
                 <a:spcPts val="1000"/>
               </a:spcAft>
+              <a:buSzPct val="100000"/>
               <a:buChar char="•"/>
               <a:lnSpc>
                 <a:spcPts val="2200"/>
@@ -6188,10 +6260,12 @@
             </a:r>
           </a:p>
           <a:p>
-            <a:pPr>
+            <a:pPr lvl="0" marL="457200" indent="-228600">
+              <a:buFont typeface="Calibri"/>
               <a:spcAft>
                 <a:spcPts val="1000"/>
               </a:spcAft>
+              <a:buSzPct val="100000"/>
               <a:buChar char="•"/>
               <a:lnSpc>
                 <a:spcPts val="2200"/>
@@ -6208,10 +6282,12 @@
             </a:r>
           </a:p>
           <a:p>
-            <a:pPr>
+            <a:pPr lvl="0" marL="457200" indent="-228600">
+              <a:buFont typeface="Calibri"/>
               <a:spcAft>
                 <a:spcPts val="1000"/>
               </a:spcAft>
+              <a:buSzPct val="100000"/>
               <a:buChar char="•"/>
               <a:lnSpc>
                 <a:spcPts val="2200"/>
@@ -6228,10 +6304,12 @@
             </a:r>
           </a:p>
           <a:p>
-            <a:pPr>
+            <a:pPr lvl="0" marL="457200" indent="-228600">
+              <a:buFont typeface="Calibri"/>
               <a:spcAft>
                 <a:spcPts val="1000"/>
               </a:spcAft>
+              <a:buSzPct val="100000"/>
               <a:buChar char="•"/>
               <a:lnSpc>
                 <a:spcPts val="2200"/>
@@ -6248,10 +6326,12 @@
             </a:r>
           </a:p>
           <a:p>
-            <a:pPr>
+            <a:pPr lvl="0" marL="457200" indent="-228600">
+              <a:buFont typeface="Calibri"/>
               <a:spcAft>
                 <a:spcPts val="1000"/>
               </a:spcAft>
+              <a:buSzPct val="100000"/>
               <a:buChar char="•"/>
               <a:lnSpc>
                 <a:spcPts val="2200"/>
